--- a/I Stand Amazed in the Presence-CH.pptx
+++ b/I Stand Amazed in the Presence-CH.pptx
@@ -265,7 +265,7 @@
           <a:p>
             <a:fld id="{E759A0DE-F190-5444-87AC-4719D5F20D15}" type="datetimeFigureOut">
               <a:rPr lang="en-US" smtClean="0"/>
-              <a:t>6/25/26</a:t>
+              <a:t>6/27/26</a:t>
             </a:fld>
             <a:endParaRPr lang="en-US"/>
           </a:p>
@@ -463,7 +463,7 @@
           <a:p>
             <a:fld id="{E759A0DE-F190-5444-87AC-4719D5F20D15}" type="datetimeFigureOut">
               <a:rPr lang="en-US" smtClean="0"/>
-              <a:t>6/25/26</a:t>
+              <a:t>6/27/26</a:t>
             </a:fld>
             <a:endParaRPr lang="en-US"/>
           </a:p>
@@ -671,7 +671,7 @@
           <a:p>
             <a:fld id="{E759A0DE-F190-5444-87AC-4719D5F20D15}" type="datetimeFigureOut">
               <a:rPr lang="en-US" smtClean="0"/>
-              <a:t>6/25/26</a:t>
+              <a:t>6/27/26</a:t>
             </a:fld>
             <a:endParaRPr lang="en-US"/>
           </a:p>
@@ -869,7 +869,7 @@
           <a:p>
             <a:fld id="{E759A0DE-F190-5444-87AC-4719D5F20D15}" type="datetimeFigureOut">
               <a:rPr lang="en-US" smtClean="0"/>
-              <a:t>6/25/26</a:t>
+              <a:t>6/27/26</a:t>
             </a:fld>
             <a:endParaRPr lang="en-US"/>
           </a:p>
@@ -1144,7 +1144,7 @@
           <a:p>
             <a:fld id="{E759A0DE-F190-5444-87AC-4719D5F20D15}" type="datetimeFigureOut">
               <a:rPr lang="en-US" smtClean="0"/>
-              <a:t>6/25/26</a:t>
+              <a:t>6/27/26</a:t>
             </a:fld>
             <a:endParaRPr lang="en-US"/>
           </a:p>
@@ -1409,7 +1409,7 @@
           <a:p>
             <a:fld id="{E759A0DE-F190-5444-87AC-4719D5F20D15}" type="datetimeFigureOut">
               <a:rPr lang="en-US" smtClean="0"/>
-              <a:t>6/25/26</a:t>
+              <a:t>6/27/26</a:t>
             </a:fld>
             <a:endParaRPr lang="en-US"/>
           </a:p>
@@ -1821,7 +1821,7 @@
           <a:p>
             <a:fld id="{E759A0DE-F190-5444-87AC-4719D5F20D15}" type="datetimeFigureOut">
               <a:rPr lang="en-US" smtClean="0"/>
-              <a:t>6/25/26</a:t>
+              <a:t>6/27/26</a:t>
             </a:fld>
             <a:endParaRPr lang="en-US"/>
           </a:p>
@@ -1962,7 +1962,7 @@
           <a:p>
             <a:fld id="{E759A0DE-F190-5444-87AC-4719D5F20D15}" type="datetimeFigureOut">
               <a:rPr lang="en-US" smtClean="0"/>
-              <a:t>6/25/26</a:t>
+              <a:t>6/27/26</a:t>
             </a:fld>
             <a:endParaRPr lang="en-US"/>
           </a:p>
@@ -2075,7 +2075,7 @@
           <a:p>
             <a:fld id="{E759A0DE-F190-5444-87AC-4719D5F20D15}" type="datetimeFigureOut">
               <a:rPr lang="en-US" smtClean="0"/>
-              <a:t>6/25/26</a:t>
+              <a:t>6/27/26</a:t>
             </a:fld>
             <a:endParaRPr lang="en-US"/>
           </a:p>
@@ -2386,7 +2386,7 @@
           <a:p>
             <a:fld id="{E759A0DE-F190-5444-87AC-4719D5F20D15}" type="datetimeFigureOut">
               <a:rPr lang="en-US" smtClean="0"/>
-              <a:t>6/25/26</a:t>
+              <a:t>6/27/26</a:t>
             </a:fld>
             <a:endParaRPr lang="en-US"/>
           </a:p>
@@ -2674,7 +2674,7 @@
           <a:p>
             <a:fld id="{E759A0DE-F190-5444-87AC-4719D5F20D15}" type="datetimeFigureOut">
               <a:rPr lang="en-US" smtClean="0"/>
-              <a:t>6/25/26</a:t>
+              <a:t>6/27/26</a:t>
             </a:fld>
             <a:endParaRPr lang="en-US"/>
           </a:p>
@@ -2915,7 +2915,7 @@
           <a:p>
             <a:fld id="{E759A0DE-F190-5444-87AC-4719D5F20D15}" type="datetimeFigureOut">
               <a:rPr lang="en-US" smtClean="0"/>
-              <a:t>6/25/26</a:t>
+              <a:t>6/27/26</a:t>
             </a:fld>
             <a:endParaRPr lang="en-US"/>
           </a:p>
@@ -4962,6 +4962,71 @@
           </a:p>
         </p:txBody>
       </p:sp>
+      <p:sp>
+        <p:nvSpPr>
+          <p:cNvPr id="2" name="TextBox 1">
+            <a:extLst>
+              <a:ext uri="{FF2B5EF4-FFF2-40B4-BE49-F238E27FC236}">
+                <a16:creationId xmlns:a16="http://schemas.microsoft.com/office/drawing/2014/main" id="{047F1F59-D2E7-3F36-19B3-040E10C6F7D5}"/>
+              </a:ext>
+            </a:extLst>
+          </p:cNvPr>
+          <p:cNvSpPr txBox="1"/>
+          <p:nvPr/>
+        </p:nvSpPr>
+        <p:spPr>
+          <a:xfrm>
+            <a:off x="11153552" y="6273225"/>
+            <a:ext cx="1038447" cy="584775"/>
+          </a:xfrm>
+          <a:prstGeom prst="rect">
+            <a:avLst/>
+          </a:prstGeom>
+          <a:noFill/>
+        </p:spPr>
+        <p:txBody>
+          <a:bodyPr wrap="square" rtlCol="0">
+            <a:spAutoFit/>
+          </a:bodyPr>
+          <a:lstStyle/>
+          <a:p>
+            <a:pPr marL="0" marR="0" lvl="0" indent="0" algn="l" defTabSz="914400" rtl="0" eaLnBrk="1" fontAlgn="auto" latinLnBrk="0" hangingPunct="1">
+              <a:lnSpc>
+                <a:spcPct val="100000"/>
+              </a:lnSpc>
+              <a:spcBef>
+                <a:spcPts val="0"/>
+              </a:spcBef>
+              <a:spcAft>
+                <a:spcPts val="0"/>
+              </a:spcAft>
+              <a:buClrTx/>
+              <a:buSzTx/>
+              <a:buFontTx/>
+              <a:buNone/>
+              <a:tabLst/>
+              <a:defRPr/>
+            </a:pPr>
+            <a:r>
+              <a:rPr kumimoji="0" lang="en-US" sz="3200" b="0" i="0" u="none" strike="noStrike" kern="1200" cap="none" spc="0" normalizeH="0" baseline="0" noProof="0" dirty="0">
+                <a:ln>
+                  <a:noFill/>
+                </a:ln>
+                <a:solidFill>
+                  <a:srgbClr val="FFFF00"/>
+                </a:solidFill>
+                <a:effectLst/>
+                <a:uLnTx/>
+                <a:uFillTx/>
+                <a:latin typeface="Aptos" panose="02110004020202020204"/>
+                <a:ea typeface="+mn-ea"/>
+                <a:cs typeface="+mn-cs"/>
+              </a:rPr>
+              <a:t>END</a:t>
+            </a:r>
+          </a:p>
+        </p:txBody>
+      </p:sp>
     </p:spTree>
     <p:extLst>
       <p:ext uri="{BB962C8B-B14F-4D97-AF65-F5344CB8AC3E}">
